--- a/STP/presentations/Survey/results_survey_ST.pptx
+++ b/STP/presentations/Survey/results_survey_ST.pptx
@@ -7,6 +7,8 @@
   <p:sldIdLst>
     <p:sldId id="278" r:id="rId2"/>
     <p:sldId id="256" r:id="rId3"/>
+    <p:sldId id="280" r:id="rId4"/>
+    <p:sldId id="279" r:id="rId5"/>
   </p:sldIdLst>
   <p:sldSz cx="12192000" cy="6858000"/>
   <p:notesSz cx="6858000" cy="9144000"/>
@@ -105,6 +107,11 @@
       </a:defRPr>
     </a:lvl9pPr>
   </p:defaultTextStyle>
+  <p:extLst>
+    <p:ext uri="{EFAFB233-063F-42B5-8137-9DF3F51BA10A}">
+      <p15:sldGuideLst xmlns:p15="http://schemas.microsoft.com/office/powerpoint/2012/main"/>
+    </p:ext>
+  </p:extLst>
 </p:presentation>
 </file>
 
@@ -257,7 +264,7 @@
           <a:p>
             <a:fld id="{EEE01112-262A-2648-A829-0A10B0E34E16}" type="datetimeFigureOut">
               <a:rPr lang="en-IT" smtClean="0"/>
-              <a:t>01/12/25</a:t>
+              <a:t>04/12/25</a:t>
             </a:fld>
             <a:endParaRPr lang="en-IT"/>
           </a:p>
@@ -457,7 +464,7 @@
           <a:p>
             <a:fld id="{EEE01112-262A-2648-A829-0A10B0E34E16}" type="datetimeFigureOut">
               <a:rPr lang="en-IT" smtClean="0"/>
-              <a:t>01/12/25</a:t>
+              <a:t>04/12/25</a:t>
             </a:fld>
             <a:endParaRPr lang="en-IT"/>
           </a:p>
@@ -667,7 +674,7 @@
           <a:p>
             <a:fld id="{EEE01112-262A-2648-A829-0A10B0E34E16}" type="datetimeFigureOut">
               <a:rPr lang="en-IT" smtClean="0"/>
-              <a:t>01/12/25</a:t>
+              <a:t>04/12/25</a:t>
             </a:fld>
             <a:endParaRPr lang="en-IT"/>
           </a:p>
@@ -867,7 +874,7 @@
           <a:p>
             <a:fld id="{EEE01112-262A-2648-A829-0A10B0E34E16}" type="datetimeFigureOut">
               <a:rPr lang="en-IT" smtClean="0"/>
-              <a:t>01/12/25</a:t>
+              <a:t>04/12/25</a:t>
             </a:fld>
             <a:endParaRPr lang="en-IT"/>
           </a:p>
@@ -1143,7 +1150,7 @@
           <a:p>
             <a:fld id="{EEE01112-262A-2648-A829-0A10B0E34E16}" type="datetimeFigureOut">
               <a:rPr lang="en-IT" smtClean="0"/>
-              <a:t>01/12/25</a:t>
+              <a:t>04/12/25</a:t>
             </a:fld>
             <a:endParaRPr lang="en-IT"/>
           </a:p>
@@ -1411,7 +1418,7 @@
           <a:p>
             <a:fld id="{EEE01112-262A-2648-A829-0A10B0E34E16}" type="datetimeFigureOut">
               <a:rPr lang="en-IT" smtClean="0"/>
-              <a:t>01/12/25</a:t>
+              <a:t>04/12/25</a:t>
             </a:fld>
             <a:endParaRPr lang="en-IT"/>
           </a:p>
@@ -1826,7 +1833,7 @@
           <a:p>
             <a:fld id="{EEE01112-262A-2648-A829-0A10B0E34E16}" type="datetimeFigureOut">
               <a:rPr lang="en-IT" smtClean="0"/>
-              <a:t>01/12/25</a:t>
+              <a:t>04/12/25</a:t>
             </a:fld>
             <a:endParaRPr lang="en-IT"/>
           </a:p>
@@ -1968,7 +1975,7 @@
           <a:p>
             <a:fld id="{EEE01112-262A-2648-A829-0A10B0E34E16}" type="datetimeFigureOut">
               <a:rPr lang="en-IT" smtClean="0"/>
-              <a:t>01/12/25</a:t>
+              <a:t>04/12/25</a:t>
             </a:fld>
             <a:endParaRPr lang="en-IT"/>
           </a:p>
@@ -2081,7 +2088,7 @@
           <a:p>
             <a:fld id="{EEE01112-262A-2648-A829-0A10B0E34E16}" type="datetimeFigureOut">
               <a:rPr lang="en-IT" smtClean="0"/>
-              <a:t>01/12/25</a:t>
+              <a:t>04/12/25</a:t>
             </a:fld>
             <a:endParaRPr lang="en-IT"/>
           </a:p>
@@ -2394,7 +2401,7 @@
           <a:p>
             <a:fld id="{EEE01112-262A-2648-A829-0A10B0E34E16}" type="datetimeFigureOut">
               <a:rPr lang="en-IT" smtClean="0"/>
-              <a:t>01/12/25</a:t>
+              <a:t>04/12/25</a:t>
             </a:fld>
             <a:endParaRPr lang="en-IT"/>
           </a:p>
@@ -2683,7 +2690,7 @@
           <a:p>
             <a:fld id="{EEE01112-262A-2648-A829-0A10B0E34E16}" type="datetimeFigureOut">
               <a:rPr lang="en-IT" smtClean="0"/>
-              <a:t>01/12/25</a:t>
+              <a:t>04/12/25</a:t>
             </a:fld>
             <a:endParaRPr lang="en-IT"/>
           </a:p>
@@ -2926,7 +2933,7 @@
           <a:p>
             <a:fld id="{EEE01112-262A-2648-A829-0A10B0E34E16}" type="datetimeFigureOut">
               <a:rPr lang="en-IT" smtClean="0"/>
-              <a:t>01/12/25</a:t>
+              <a:t>04/12/25</a:t>
             </a:fld>
             <a:endParaRPr lang="en-IT"/>
           </a:p>
@@ -3505,14 +3512,17 @@
               </a:rPr>
               <a:t>pesquisa</a:t>
             </a:r>
-            <a:endParaRPr lang="it-IT" b="1" cap="all" dirty="0">
-              <a:solidFill>
-                <a:schemeClr val="accent5">
-                  <a:lumMod val="75000"/>
-                </a:schemeClr>
-              </a:solidFill>
-              <a:latin typeface="Georgia" panose="02040502050405020303" pitchFamily="18" charset="0"/>
-            </a:endParaRPr>
+            <a:r>
+              <a:rPr lang="it-IT" b="1" cap="all" dirty="0">
+                <a:solidFill>
+                  <a:schemeClr val="accent5">
+                    <a:lumMod val="75000"/>
+                  </a:schemeClr>
+                </a:solidFill>
+                <a:latin typeface="Georgia" panose="02040502050405020303" pitchFamily="18" charset="0"/>
+              </a:rPr>
+              <a:t> en Sao Tome</a:t>
+            </a:r>
           </a:p>
         </p:txBody>
       </p:sp>
@@ -4502,6 +4512,1206 @@
     <p:extLst>
       <p:ext uri="{BB962C8B-B14F-4D97-AF65-F5344CB8AC3E}">
         <p14:creationId xmlns:p14="http://schemas.microsoft.com/office/powerpoint/2010/main" val="3988017232"/>
+      </p:ext>
+    </p:extLst>
+  </p:cSld>
+  <p:clrMapOvr>
+    <a:masterClrMapping/>
+  </p:clrMapOvr>
+</p:sld>
+</file>
+
+<file path=ppt/slides/slide3.xml><?xml version="1.0" encoding="utf-8"?>
+<p:sld xmlns:a="http://schemas.openxmlformats.org/drawingml/2006/main" xmlns:r="http://schemas.openxmlformats.org/officeDocument/2006/relationships" xmlns:p="http://schemas.openxmlformats.org/presentationml/2006/main">
+  <p:cSld>
+    <p:spTree>
+      <p:nvGrpSpPr>
+        <p:cNvPr id="1" name="">
+          <a:extLst>
+            <a:ext uri="{FF2B5EF4-FFF2-40B4-BE49-F238E27FC236}">
+              <a16:creationId xmlns:a16="http://schemas.microsoft.com/office/drawing/2014/main" id="{ED5E017E-DF66-3D4F-C161-8DE474010CC2}"/>
+            </a:ext>
+          </a:extLst>
+        </p:cNvPr>
+        <p:cNvGrpSpPr/>
+        <p:nvPr/>
+      </p:nvGrpSpPr>
+      <p:grpSpPr>
+        <a:xfrm>
+          <a:off x="0" y="0"/>
+          <a:ext cx="0" cy="0"/>
+          <a:chOff x="0" y="0"/>
+          <a:chExt cx="0" cy="0"/>
+        </a:xfrm>
+      </p:grpSpPr>
+      <p:sp>
+        <p:nvSpPr>
+          <p:cNvPr id="2" name="Title 1">
+            <a:extLst>
+              <a:ext uri="{FF2B5EF4-FFF2-40B4-BE49-F238E27FC236}">
+                <a16:creationId xmlns:a16="http://schemas.microsoft.com/office/drawing/2014/main" id="{E59A057C-77CF-80BF-5A32-77009A25C1F9}"/>
+              </a:ext>
+            </a:extLst>
+          </p:cNvPr>
+          <p:cNvSpPr>
+            <a:spLocks noGrp="1"/>
+          </p:cNvSpPr>
+          <p:nvPr>
+            <p:ph type="ctrTitle"/>
+          </p:nvPr>
+        </p:nvSpPr>
+        <p:spPr>
+          <a:xfrm>
+            <a:off x="1523999" y="2060179"/>
+            <a:ext cx="9144000" cy="1655762"/>
+          </a:xfrm>
+        </p:spPr>
+        <p:txBody>
+          <a:bodyPr>
+            <a:normAutofit fontScale="90000"/>
+          </a:bodyPr>
+          <a:lstStyle/>
+          <a:p>
+            <a:pPr>
+              <a:lnSpc>
+                <a:spcPct val="150000"/>
+              </a:lnSpc>
+            </a:pPr>
+            <a:r>
+              <a:rPr lang="en-US" sz="2400" dirty="0">
+                <a:solidFill>
+                  <a:srgbClr val="0070C0"/>
+                </a:solidFill>
+                <a:latin typeface="Arial"/>
+                <a:cs typeface="Arial"/>
+              </a:rPr>
+              <a:t>Technical workshop for GCF project: </a:t>
+            </a:r>
+            <a:r>
+              <a:rPr lang="en-GB" sz="2400" dirty="0">
+                <a:solidFill>
+                  <a:srgbClr val="0070C0"/>
+                </a:solidFill>
+                <a:latin typeface="Arial"/>
+                <a:cs typeface="Arial"/>
+              </a:rPr>
+              <a:t>Climate change and climate change impacts on São Tomé and Príncipe with a focus on fishery and tourism sectors in a Blue Economy context</a:t>
+            </a:r>
+            <a:br>
+              <a:rPr lang="en-US" sz="3600" dirty="0">
+                <a:latin typeface="Arial" panose="020B0604020202020204" pitchFamily="34" charset="0"/>
+                <a:cs typeface="Arial" panose="020B0604020202020204" pitchFamily="34" charset="0"/>
+              </a:rPr>
+            </a:br>
+            <a:r>
+              <a:rPr lang="en-US" sz="1800" dirty="0">
+                <a:solidFill>
+                  <a:srgbClr val="0070C0"/>
+                </a:solidFill>
+                <a:latin typeface="Arial"/>
+                <a:cs typeface="Arial"/>
+              </a:rPr>
+              <a:t>Sao Tome and Principe, November/December 2025</a:t>
+            </a:r>
+            <a:endParaRPr lang="en-US" sz="3600" dirty="0">
+              <a:solidFill>
+                <a:srgbClr val="0070C0"/>
+              </a:solidFill>
+              <a:latin typeface="Arial"/>
+              <a:cs typeface="Arial"/>
+            </a:endParaRPr>
+          </a:p>
+        </p:txBody>
+      </p:sp>
+      <p:sp>
+        <p:nvSpPr>
+          <p:cNvPr id="3" name="Subtitle 2">
+            <a:extLst>
+              <a:ext uri="{FF2B5EF4-FFF2-40B4-BE49-F238E27FC236}">
+                <a16:creationId xmlns:a16="http://schemas.microsoft.com/office/drawing/2014/main" id="{3AD3D261-DF07-5B94-E9A1-8968C82534A2}"/>
+              </a:ext>
+            </a:extLst>
+          </p:cNvPr>
+          <p:cNvSpPr>
+            <a:spLocks noGrp="1"/>
+          </p:cNvSpPr>
+          <p:nvPr>
+            <p:ph type="subTitle" idx="1"/>
+          </p:nvPr>
+        </p:nvSpPr>
+        <p:spPr>
+          <a:xfrm>
+            <a:off x="882502" y="4373677"/>
+            <a:ext cx="10621925" cy="1655762"/>
+          </a:xfrm>
+        </p:spPr>
+        <p:txBody>
+          <a:bodyPr>
+            <a:normAutofit/>
+          </a:bodyPr>
+          <a:lstStyle/>
+          <a:p>
+            <a:r>
+              <a:rPr lang="it-IT" b="1" cap="all" dirty="0" err="1">
+                <a:solidFill>
+                  <a:schemeClr val="accent5">
+                    <a:lumMod val="75000"/>
+                  </a:schemeClr>
+                </a:solidFill>
+                <a:latin typeface="Georgia" panose="02040502050405020303" pitchFamily="18" charset="0"/>
+              </a:rPr>
+              <a:t>Resultados</a:t>
+            </a:r>
+            <a:r>
+              <a:rPr lang="it-IT" b="1" cap="all" dirty="0">
+                <a:solidFill>
+                  <a:schemeClr val="accent5">
+                    <a:lumMod val="75000"/>
+                  </a:schemeClr>
+                </a:solidFill>
+                <a:latin typeface="Georgia" panose="02040502050405020303" pitchFamily="18" charset="0"/>
+              </a:rPr>
+              <a:t> </a:t>
+            </a:r>
+            <a:r>
+              <a:rPr lang="it-IT" b="1" cap="all" dirty="0" err="1">
+                <a:solidFill>
+                  <a:schemeClr val="accent5">
+                    <a:lumMod val="75000"/>
+                  </a:schemeClr>
+                </a:solidFill>
+                <a:latin typeface="Georgia" panose="02040502050405020303" pitchFamily="18" charset="0"/>
+              </a:rPr>
+              <a:t>preliminares</a:t>
+            </a:r>
+            <a:r>
+              <a:rPr lang="it-IT" b="1" cap="all" dirty="0">
+                <a:solidFill>
+                  <a:schemeClr val="accent5">
+                    <a:lumMod val="75000"/>
+                  </a:schemeClr>
+                </a:solidFill>
+                <a:latin typeface="Georgia" panose="02040502050405020303" pitchFamily="18" charset="0"/>
+              </a:rPr>
+              <a:t> da </a:t>
+            </a:r>
+            <a:r>
+              <a:rPr lang="it-IT" b="1" cap="all" dirty="0" err="1">
+                <a:solidFill>
+                  <a:schemeClr val="accent5">
+                    <a:lumMod val="75000"/>
+                  </a:schemeClr>
+                </a:solidFill>
+                <a:latin typeface="Georgia" panose="02040502050405020303" pitchFamily="18" charset="0"/>
+              </a:rPr>
+              <a:t>pesquisa</a:t>
+            </a:r>
+            <a:r>
+              <a:rPr lang="it-IT" b="1" cap="all" dirty="0">
+                <a:solidFill>
+                  <a:schemeClr val="accent5">
+                    <a:lumMod val="75000"/>
+                  </a:schemeClr>
+                </a:solidFill>
+                <a:latin typeface="Georgia" panose="02040502050405020303" pitchFamily="18" charset="0"/>
+              </a:rPr>
+              <a:t> en principe</a:t>
+            </a:r>
+          </a:p>
+        </p:txBody>
+      </p:sp>
+      <p:pic>
+        <p:nvPicPr>
+          <p:cNvPr id="7" name="Picture 6" descr="Graphical user interface, text&#10;&#10;Description automatically generated">
+            <a:extLst>
+              <a:ext uri="{FF2B5EF4-FFF2-40B4-BE49-F238E27FC236}">
+                <a16:creationId xmlns:a16="http://schemas.microsoft.com/office/drawing/2014/main" id="{C372E88D-1B46-D082-6AED-F68C6001070B}"/>
+              </a:ext>
+            </a:extLst>
+          </p:cNvPr>
+          <p:cNvPicPr>
+            <a:picLocks noChangeAspect="1"/>
+          </p:cNvPicPr>
+          <p:nvPr/>
+        </p:nvPicPr>
+        <p:blipFill>
+          <a:blip r:embed="rId2"/>
+          <a:srcRect r="31257"/>
+          <a:stretch>
+            <a:fillRect/>
+          </a:stretch>
+        </p:blipFill>
+        <p:spPr>
+          <a:xfrm>
+            <a:off x="594821" y="257459"/>
+            <a:ext cx="3014653" cy="1003438"/>
+          </a:xfrm>
+          <a:prstGeom prst="rect">
+            <a:avLst/>
+          </a:prstGeom>
+        </p:spPr>
+      </p:pic>
+      <p:cxnSp>
+        <p:nvCxnSpPr>
+          <p:cNvPr id="10" name="Straight Connector 9">
+            <a:extLst>
+              <a:ext uri="{FF2B5EF4-FFF2-40B4-BE49-F238E27FC236}">
+                <a16:creationId xmlns:a16="http://schemas.microsoft.com/office/drawing/2014/main" id="{777B9592-4CED-5E33-8CCB-DC536A2D637B}"/>
+              </a:ext>
+            </a:extLst>
+          </p:cNvPr>
+          <p:cNvCxnSpPr/>
+          <p:nvPr/>
+        </p:nvCxnSpPr>
+        <p:spPr>
+          <a:xfrm>
+            <a:off x="968828" y="3935186"/>
+            <a:ext cx="10254343" cy="0"/>
+          </a:xfrm>
+          <a:prstGeom prst="line">
+            <a:avLst/>
+          </a:prstGeom>
+        </p:spPr>
+        <p:style>
+          <a:lnRef idx="1">
+            <a:schemeClr val="accent1"/>
+          </a:lnRef>
+          <a:fillRef idx="0">
+            <a:schemeClr val="accent1"/>
+          </a:fillRef>
+          <a:effectRef idx="0">
+            <a:schemeClr val="accent1"/>
+          </a:effectRef>
+          <a:fontRef idx="minor">
+            <a:schemeClr val="tx1"/>
+          </a:fontRef>
+        </p:style>
+      </p:cxnSp>
+      <p:grpSp>
+        <p:nvGrpSpPr>
+          <p:cNvPr id="14" name="Group 13">
+            <a:extLst>
+              <a:ext uri="{FF2B5EF4-FFF2-40B4-BE49-F238E27FC236}">
+                <a16:creationId xmlns:a16="http://schemas.microsoft.com/office/drawing/2014/main" id="{3BC31CBB-3EEB-93F2-E9FB-6FC1D0280434}"/>
+              </a:ext>
+            </a:extLst>
+          </p:cNvPr>
+          <p:cNvGrpSpPr/>
+          <p:nvPr/>
+        </p:nvGrpSpPr>
+        <p:grpSpPr>
+          <a:xfrm>
+            <a:off x="-16329" y="1390670"/>
+            <a:ext cx="12208329" cy="262452"/>
+            <a:chOff x="-16329" y="6677194"/>
+            <a:chExt cx="12208329" cy="262452"/>
+          </a:xfrm>
+        </p:grpSpPr>
+        <p:sp>
+          <p:nvSpPr>
+            <p:cNvPr id="12" name="Rectangle 11">
+              <a:extLst>
+                <a:ext uri="{FF2B5EF4-FFF2-40B4-BE49-F238E27FC236}">
+                  <a16:creationId xmlns:a16="http://schemas.microsoft.com/office/drawing/2014/main" id="{C257BF19-37E9-680C-AF50-5344BFD10A39}"/>
+                </a:ext>
+              </a:extLst>
+            </p:cNvPr>
+            <p:cNvSpPr/>
+            <p:nvPr/>
+          </p:nvSpPr>
+          <p:spPr>
+            <a:xfrm>
+              <a:off x="6384471" y="6678386"/>
+              <a:ext cx="3804558" cy="261259"/>
+            </a:xfrm>
+            <a:prstGeom prst="rect">
+              <a:avLst/>
+            </a:prstGeom>
+            <a:ln>
+              <a:noFill/>
+            </a:ln>
+          </p:spPr>
+          <p:style>
+            <a:lnRef idx="2">
+              <a:schemeClr val="accent1">
+                <a:shade val="50000"/>
+              </a:schemeClr>
+            </a:lnRef>
+            <a:fillRef idx="1">
+              <a:schemeClr val="accent1"/>
+            </a:fillRef>
+            <a:effectRef idx="0">
+              <a:schemeClr val="accent1"/>
+            </a:effectRef>
+            <a:fontRef idx="minor">
+              <a:schemeClr val="lt1"/>
+            </a:fontRef>
+          </p:style>
+          <p:txBody>
+            <a:bodyPr rtlCol="0" anchor="ctr"/>
+            <a:lstStyle/>
+            <a:p>
+              <a:pPr algn="ctr"/>
+              <a:endParaRPr lang="en-US"/>
+            </a:p>
+          </p:txBody>
+        </p:sp>
+        <p:sp>
+          <p:nvSpPr>
+            <p:cNvPr id="11" name="Rectangle 10">
+              <a:extLst>
+                <a:ext uri="{FF2B5EF4-FFF2-40B4-BE49-F238E27FC236}">
+                  <a16:creationId xmlns:a16="http://schemas.microsoft.com/office/drawing/2014/main" id="{CC61345D-9161-5261-7884-FA5F5737A2FF}"/>
+                </a:ext>
+              </a:extLst>
+            </p:cNvPr>
+            <p:cNvSpPr/>
+            <p:nvPr/>
+          </p:nvSpPr>
+          <p:spPr>
+            <a:xfrm>
+              <a:off x="-16329" y="6678388"/>
+              <a:ext cx="6400800" cy="261258"/>
+            </a:xfrm>
+            <a:prstGeom prst="rect">
+              <a:avLst/>
+            </a:prstGeom>
+            <a:solidFill>
+              <a:schemeClr val="accent5">
+                <a:lumMod val="50000"/>
+              </a:schemeClr>
+            </a:solidFill>
+            <a:ln>
+              <a:noFill/>
+            </a:ln>
+          </p:spPr>
+          <p:style>
+            <a:lnRef idx="2">
+              <a:schemeClr val="accent1">
+                <a:shade val="50000"/>
+              </a:schemeClr>
+            </a:lnRef>
+            <a:fillRef idx="1">
+              <a:schemeClr val="accent1"/>
+            </a:fillRef>
+            <a:effectRef idx="0">
+              <a:schemeClr val="accent1"/>
+            </a:effectRef>
+            <a:fontRef idx="minor">
+              <a:schemeClr val="lt1"/>
+            </a:fontRef>
+          </p:style>
+          <p:txBody>
+            <a:bodyPr rtlCol="0" anchor="ctr"/>
+            <a:lstStyle/>
+            <a:p>
+              <a:pPr algn="ctr"/>
+              <a:endParaRPr lang="en-US"/>
+            </a:p>
+          </p:txBody>
+        </p:sp>
+        <p:sp>
+          <p:nvSpPr>
+            <p:cNvPr id="13" name="Rectangle 12">
+              <a:extLst>
+                <a:ext uri="{FF2B5EF4-FFF2-40B4-BE49-F238E27FC236}">
+                  <a16:creationId xmlns:a16="http://schemas.microsoft.com/office/drawing/2014/main" id="{C0675AB8-12D1-57B6-AFE9-C1521B09BC42}"/>
+                </a:ext>
+              </a:extLst>
+            </p:cNvPr>
+            <p:cNvSpPr/>
+            <p:nvPr/>
+          </p:nvSpPr>
+          <p:spPr>
+            <a:xfrm>
+              <a:off x="10189029" y="6677194"/>
+              <a:ext cx="2002971" cy="262451"/>
+            </a:xfrm>
+            <a:prstGeom prst="rect">
+              <a:avLst/>
+            </a:prstGeom>
+            <a:solidFill>
+              <a:schemeClr val="accent4"/>
+            </a:solidFill>
+            <a:ln>
+              <a:noFill/>
+            </a:ln>
+          </p:spPr>
+          <p:style>
+            <a:lnRef idx="2">
+              <a:schemeClr val="accent1">
+                <a:shade val="50000"/>
+              </a:schemeClr>
+            </a:lnRef>
+            <a:fillRef idx="1">
+              <a:schemeClr val="accent1"/>
+            </a:fillRef>
+            <a:effectRef idx="0">
+              <a:schemeClr val="accent1"/>
+            </a:effectRef>
+            <a:fontRef idx="minor">
+              <a:schemeClr val="lt1"/>
+            </a:fontRef>
+          </p:style>
+          <p:txBody>
+            <a:bodyPr rtlCol="0" anchor="ctr"/>
+            <a:lstStyle/>
+            <a:p>
+              <a:pPr algn="ctr"/>
+              <a:endParaRPr lang="en-US"/>
+            </a:p>
+          </p:txBody>
+        </p:sp>
+      </p:grpSp>
+      <p:pic>
+        <p:nvPicPr>
+          <p:cNvPr id="3074" name="Picture 2">
+            <a:extLst>
+              <a:ext uri="{FF2B5EF4-FFF2-40B4-BE49-F238E27FC236}">
+                <a16:creationId xmlns:a16="http://schemas.microsoft.com/office/drawing/2014/main" id="{648BA912-805A-5A7A-FE9C-85EF808BDE35}"/>
+              </a:ext>
+            </a:extLst>
+          </p:cNvPr>
+          <p:cNvPicPr>
+            <a:picLocks noChangeAspect="1" noChangeArrowheads="1"/>
+          </p:cNvPicPr>
+          <p:nvPr/>
+        </p:nvPicPr>
+        <p:blipFill>
+          <a:blip r:embed="rId3">
+            <a:extLst>
+              <a:ext uri="{28A0092B-C50C-407E-A947-70E740481C1C}">
+                <a14:useLocalDpi xmlns:a14="http://schemas.microsoft.com/office/drawing/2010/main" val="0"/>
+              </a:ext>
+            </a:extLst>
+          </a:blip>
+          <a:srcRect/>
+          <a:stretch>
+            <a:fillRect/>
+          </a:stretch>
+        </p:blipFill>
+        <p:spPr bwMode="auto">
+          <a:xfrm>
+            <a:off x="9102166" y="174034"/>
+            <a:ext cx="2173726" cy="1086863"/>
+          </a:xfrm>
+          <a:prstGeom prst="rect">
+            <a:avLst/>
+          </a:prstGeom>
+          <a:noFill/>
+          <a:extLst>
+            <a:ext uri="{909E8E84-426E-40DD-AFC4-6F175D3DCCD1}">
+              <a14:hiddenFill xmlns:a14="http://schemas.microsoft.com/office/drawing/2010/main">
+                <a:solidFill>
+                  <a:srgbClr val="FFFFFF"/>
+                </a:solidFill>
+              </a14:hiddenFill>
+            </a:ext>
+          </a:extLst>
+        </p:spPr>
+      </p:pic>
+    </p:spTree>
+    <p:extLst>
+      <p:ext uri="{BB962C8B-B14F-4D97-AF65-F5344CB8AC3E}">
+        <p14:creationId xmlns:p14="http://schemas.microsoft.com/office/powerpoint/2010/main" val="1464205356"/>
+      </p:ext>
+    </p:extLst>
+  </p:cSld>
+  <p:clrMapOvr>
+    <a:masterClrMapping/>
+  </p:clrMapOvr>
+</p:sld>
+</file>
+
+<file path=ppt/slides/slide4.xml><?xml version="1.0" encoding="utf-8"?>
+<p:sld xmlns:a="http://schemas.openxmlformats.org/drawingml/2006/main" xmlns:r="http://schemas.openxmlformats.org/officeDocument/2006/relationships" xmlns:p="http://schemas.openxmlformats.org/presentationml/2006/main">
+  <p:cSld>
+    <p:spTree>
+      <p:nvGrpSpPr>
+        <p:cNvPr id="1" name="">
+          <a:extLst>
+            <a:ext uri="{FF2B5EF4-FFF2-40B4-BE49-F238E27FC236}">
+              <a16:creationId xmlns:a16="http://schemas.microsoft.com/office/drawing/2014/main" id="{F7269D29-F733-D925-7D34-0B1826AFB7E3}"/>
+            </a:ext>
+          </a:extLst>
+        </p:cNvPr>
+        <p:cNvGrpSpPr/>
+        <p:nvPr/>
+      </p:nvGrpSpPr>
+      <p:grpSpPr>
+        <a:xfrm>
+          <a:off x="0" y="0"/>
+          <a:ext cx="0" cy="0"/>
+          <a:chOff x="0" y="0"/>
+          <a:chExt cx="0" cy="0"/>
+        </a:xfrm>
+      </p:grpSpPr>
+      <p:sp>
+        <p:nvSpPr>
+          <p:cNvPr id="6" name="TextBox 5">
+            <a:extLst>
+              <a:ext uri="{FF2B5EF4-FFF2-40B4-BE49-F238E27FC236}">
+                <a16:creationId xmlns:a16="http://schemas.microsoft.com/office/drawing/2014/main" id="{131685BD-97E2-AD3A-08C7-07C5132783E4}"/>
+              </a:ext>
+            </a:extLst>
+          </p:cNvPr>
+          <p:cNvSpPr txBox="1"/>
+          <p:nvPr/>
+        </p:nvSpPr>
+        <p:spPr>
+          <a:xfrm>
+            <a:off x="6836735" y="818707"/>
+            <a:ext cx="4380614" cy="646331"/>
+          </a:xfrm>
+          <a:prstGeom prst="rect">
+            <a:avLst/>
+          </a:prstGeom>
+          <a:noFill/>
+          <a:ln w="25400">
+            <a:solidFill>
+              <a:srgbClr val="FF0000"/>
+            </a:solidFill>
+          </a:ln>
+        </p:spPr>
+        <p:txBody>
+          <a:bodyPr wrap="square" rtlCol="0">
+            <a:spAutoFit/>
+          </a:bodyPr>
+          <a:lstStyle/>
+          <a:p>
+            <a:r>
+              <a:rPr lang="en-GB" dirty="0"/>
+              <a:t>A</a:t>
+            </a:r>
+            <a:r>
+              <a:rPr lang="en-IT" dirty="0"/>
+              <a:t>ctivity_14=</a:t>
+            </a:r>
+            <a:r>
+              <a:rPr lang="en-GB" dirty="0" err="1"/>
+              <a:t>construção</a:t>
+            </a:r>
+            <a:r>
+              <a:rPr lang="en-GB" dirty="0"/>
+              <a:t> de </a:t>
+            </a:r>
+            <a:r>
+              <a:rPr lang="en-GB" dirty="0" err="1"/>
+              <a:t>valas</a:t>
+            </a:r>
+            <a:r>
+              <a:rPr lang="en-GB" dirty="0"/>
+              <a:t> de </a:t>
+            </a:r>
+            <a:r>
+              <a:rPr lang="en-GB" dirty="0" err="1"/>
+              <a:t>drenagem</a:t>
+            </a:r>
+            <a:r>
+              <a:rPr lang="en-GB" dirty="0"/>
+              <a:t> e </a:t>
+            </a:r>
+            <a:r>
+              <a:rPr lang="en-GB" dirty="0" err="1"/>
+              <a:t>reservatórios</a:t>
+            </a:r>
+            <a:r>
+              <a:rPr lang="en-GB" dirty="0"/>
+              <a:t> de </a:t>
+            </a:r>
+            <a:r>
+              <a:rPr lang="en-GB" dirty="0" err="1"/>
+              <a:t>água</a:t>
+            </a:r>
+            <a:endParaRPr lang="en-IT" dirty="0"/>
+          </a:p>
+        </p:txBody>
+      </p:sp>
+      <p:sp>
+        <p:nvSpPr>
+          <p:cNvPr id="7" name="TextBox 6">
+            <a:extLst>
+              <a:ext uri="{FF2B5EF4-FFF2-40B4-BE49-F238E27FC236}">
+                <a16:creationId xmlns:a16="http://schemas.microsoft.com/office/drawing/2014/main" id="{4E5EFAAF-10E6-EB29-AA88-CD653BBB0DF4}"/>
+              </a:ext>
+            </a:extLst>
+          </p:cNvPr>
+          <p:cNvSpPr txBox="1"/>
+          <p:nvPr/>
+        </p:nvSpPr>
+        <p:spPr>
+          <a:xfrm>
+            <a:off x="6836735" y="1633716"/>
+            <a:ext cx="4380614" cy="646331"/>
+          </a:xfrm>
+          <a:prstGeom prst="rect">
+            <a:avLst/>
+          </a:prstGeom>
+          <a:solidFill>
+            <a:schemeClr val="bg1"/>
+          </a:solidFill>
+          <a:ln w="25400">
+            <a:solidFill>
+              <a:srgbClr val="FF0000"/>
+            </a:solidFill>
+          </a:ln>
+        </p:spPr>
+        <p:txBody>
+          <a:bodyPr wrap="square" rtlCol="0">
+            <a:spAutoFit/>
+          </a:bodyPr>
+          <a:lstStyle/>
+          <a:p>
+            <a:r>
+              <a:rPr lang="en-GB" dirty="0"/>
+              <a:t>A</a:t>
+            </a:r>
+            <a:r>
+              <a:rPr lang="en-IT" dirty="0"/>
+              <a:t>ctivity_11=</a:t>
+            </a:r>
+            <a:r>
+              <a:rPr lang="en-GB" dirty="0" err="1"/>
+              <a:t>Estabelecimento</a:t>
+            </a:r>
+            <a:r>
+              <a:rPr lang="en-GB" dirty="0"/>
+              <a:t> de um Sistema de </a:t>
+            </a:r>
+            <a:r>
+              <a:rPr lang="en-GB" dirty="0" err="1"/>
+              <a:t>Alerta</a:t>
+            </a:r>
+            <a:r>
+              <a:rPr lang="en-GB" dirty="0"/>
+              <a:t> </a:t>
+            </a:r>
+            <a:r>
+              <a:rPr lang="en-GB" dirty="0" err="1"/>
+              <a:t>Climático</a:t>
+            </a:r>
+            <a:endParaRPr lang="en-IT" dirty="0"/>
+          </a:p>
+        </p:txBody>
+      </p:sp>
+      <p:sp>
+        <p:nvSpPr>
+          <p:cNvPr id="8" name="TextBox 7">
+            <a:extLst>
+              <a:ext uri="{FF2B5EF4-FFF2-40B4-BE49-F238E27FC236}">
+                <a16:creationId xmlns:a16="http://schemas.microsoft.com/office/drawing/2014/main" id="{5CC87ADB-6D38-DD3F-F0AC-2FFFC7BF6642}"/>
+              </a:ext>
+            </a:extLst>
+          </p:cNvPr>
+          <p:cNvSpPr txBox="1"/>
+          <p:nvPr/>
+        </p:nvSpPr>
+        <p:spPr>
+          <a:xfrm>
+            <a:off x="6836735" y="2782669"/>
+            <a:ext cx="4380614" cy="646331"/>
+          </a:xfrm>
+          <a:prstGeom prst="rect">
+            <a:avLst/>
+          </a:prstGeom>
+          <a:solidFill>
+            <a:schemeClr val="bg1"/>
+          </a:solidFill>
+          <a:ln w="25400">
+            <a:solidFill>
+              <a:schemeClr val="accent5">
+                <a:lumMod val="60000"/>
+                <a:lumOff val="40000"/>
+              </a:schemeClr>
+            </a:solidFill>
+          </a:ln>
+        </p:spPr>
+        <p:txBody>
+          <a:bodyPr wrap="square" rtlCol="0">
+            <a:spAutoFit/>
+          </a:bodyPr>
+          <a:lstStyle/>
+          <a:p>
+            <a:r>
+              <a:rPr lang="en-GB" dirty="0"/>
+              <a:t>A</a:t>
+            </a:r>
+            <a:r>
+              <a:rPr lang="en-IT" dirty="0"/>
+              <a:t>ctivity_6=</a:t>
+            </a:r>
+            <a:r>
+              <a:rPr lang="en-GB" dirty="0" err="1"/>
+              <a:t>Estabelecimento</a:t>
+            </a:r>
+            <a:r>
+              <a:rPr lang="en-GB" dirty="0"/>
+              <a:t> e </a:t>
+            </a:r>
+            <a:r>
+              <a:rPr lang="en-GB" dirty="0" err="1"/>
+              <a:t>Fiscalização</a:t>
+            </a:r>
+            <a:r>
+              <a:rPr lang="en-GB" dirty="0"/>
+              <a:t> de </a:t>
+            </a:r>
+            <a:r>
+              <a:rPr lang="en-GB" dirty="0" err="1"/>
+              <a:t>Áreas</a:t>
+            </a:r>
+            <a:r>
+              <a:rPr lang="en-GB" dirty="0"/>
+              <a:t> </a:t>
+            </a:r>
+            <a:r>
+              <a:rPr lang="en-GB" dirty="0" err="1"/>
+              <a:t>Marinhas</a:t>
+            </a:r>
+            <a:r>
+              <a:rPr lang="en-GB" dirty="0"/>
+              <a:t> </a:t>
+            </a:r>
+            <a:r>
+              <a:rPr lang="en-GB" dirty="0" err="1"/>
+              <a:t>Protegidas</a:t>
+            </a:r>
+            <a:endParaRPr lang="en-IT" dirty="0"/>
+          </a:p>
+        </p:txBody>
+      </p:sp>
+      <p:sp>
+        <p:nvSpPr>
+          <p:cNvPr id="9" name="TextBox 8">
+            <a:extLst>
+              <a:ext uri="{FF2B5EF4-FFF2-40B4-BE49-F238E27FC236}">
+                <a16:creationId xmlns:a16="http://schemas.microsoft.com/office/drawing/2014/main" id="{64547B72-4548-C34E-50F9-88A51308173A}"/>
+              </a:ext>
+            </a:extLst>
+          </p:cNvPr>
+          <p:cNvSpPr txBox="1"/>
+          <p:nvPr/>
+        </p:nvSpPr>
+        <p:spPr>
+          <a:xfrm>
+            <a:off x="6836735" y="3730199"/>
+            <a:ext cx="4380614" cy="646331"/>
+          </a:xfrm>
+          <a:prstGeom prst="rect">
+            <a:avLst/>
+          </a:prstGeom>
+          <a:solidFill>
+            <a:schemeClr val="bg1"/>
+          </a:solidFill>
+          <a:ln w="25400">
+            <a:solidFill>
+              <a:schemeClr val="accent5">
+                <a:lumMod val="60000"/>
+                <a:lumOff val="40000"/>
+              </a:schemeClr>
+            </a:solidFill>
+          </a:ln>
+        </p:spPr>
+        <p:txBody>
+          <a:bodyPr wrap="square" rtlCol="0">
+            <a:spAutoFit/>
+          </a:bodyPr>
+          <a:lstStyle/>
+          <a:p>
+            <a:r>
+              <a:rPr lang="en-GB" dirty="0"/>
+              <a:t>A</a:t>
+            </a:r>
+            <a:r>
+              <a:rPr lang="en-IT" dirty="0"/>
+              <a:t>ctivity_8=</a:t>
+            </a:r>
+            <a:r>
+              <a:rPr lang="en-GB" dirty="0" err="1"/>
+              <a:t>Estrutura</a:t>
+            </a:r>
+            <a:r>
+              <a:rPr lang="en-GB" dirty="0"/>
+              <a:t> </a:t>
+            </a:r>
+            <a:r>
+              <a:rPr lang="en-GB" dirty="0" err="1"/>
+              <a:t>regulatória</a:t>
+            </a:r>
+            <a:r>
+              <a:rPr lang="en-GB" dirty="0"/>
+              <a:t> para </a:t>
+            </a:r>
+            <a:r>
+              <a:rPr lang="en-GB" dirty="0" err="1"/>
+              <a:t>evitar</a:t>
+            </a:r>
+            <a:r>
+              <a:rPr lang="en-GB" dirty="0"/>
+              <a:t> a </a:t>
+            </a:r>
+            <a:r>
+              <a:rPr lang="en-GB" dirty="0" err="1"/>
+              <a:t>sobrepesca</a:t>
+            </a:r>
+            <a:endParaRPr lang="en-IT" dirty="0"/>
+          </a:p>
+        </p:txBody>
+      </p:sp>
+      <p:sp>
+        <p:nvSpPr>
+          <p:cNvPr id="10" name="TextBox 9">
+            <a:extLst>
+              <a:ext uri="{FF2B5EF4-FFF2-40B4-BE49-F238E27FC236}">
+                <a16:creationId xmlns:a16="http://schemas.microsoft.com/office/drawing/2014/main" id="{7DC8E486-B8C1-B042-A81D-4F8C98B48559}"/>
+              </a:ext>
+            </a:extLst>
+          </p:cNvPr>
+          <p:cNvSpPr txBox="1"/>
+          <p:nvPr/>
+        </p:nvSpPr>
+        <p:spPr>
+          <a:xfrm>
+            <a:off x="6836735" y="4677729"/>
+            <a:ext cx="4380614" cy="646331"/>
+          </a:xfrm>
+          <a:prstGeom prst="rect">
+            <a:avLst/>
+          </a:prstGeom>
+          <a:solidFill>
+            <a:schemeClr val="bg1"/>
+          </a:solidFill>
+          <a:ln w="25400">
+            <a:solidFill>
+              <a:schemeClr val="tx2">
+                <a:lumMod val="75000"/>
+                <a:lumOff val="25000"/>
+              </a:schemeClr>
+            </a:solidFill>
+          </a:ln>
+        </p:spPr>
+        <p:txBody>
+          <a:bodyPr wrap="square" rtlCol="0">
+            <a:spAutoFit/>
+          </a:bodyPr>
+          <a:lstStyle/>
+          <a:p>
+            <a:r>
+              <a:rPr lang="en-GB" dirty="0"/>
+              <a:t>A</a:t>
+            </a:r>
+            <a:r>
+              <a:rPr lang="en-IT" dirty="0"/>
+              <a:t>ctivity_3=</a:t>
+            </a:r>
+            <a:r>
+              <a:rPr lang="en-GB" dirty="0" err="1"/>
+              <a:t>Construção</a:t>
+            </a:r>
+            <a:r>
+              <a:rPr lang="en-GB" dirty="0"/>
+              <a:t> de </a:t>
+            </a:r>
+            <a:r>
+              <a:rPr lang="en-GB" dirty="0" err="1"/>
+              <a:t>uma</a:t>
+            </a:r>
+            <a:r>
+              <a:rPr lang="en-GB" dirty="0"/>
+              <a:t> </a:t>
+            </a:r>
+            <a:r>
+              <a:rPr lang="en-GB" dirty="0" err="1"/>
+              <a:t>oficina</a:t>
+            </a:r>
+            <a:r>
+              <a:rPr lang="en-GB" dirty="0"/>
+              <a:t> para </a:t>
+            </a:r>
+            <a:r>
+              <a:rPr lang="en-GB" dirty="0" err="1"/>
+              <a:t>barcos</a:t>
+            </a:r>
+            <a:r>
+              <a:rPr lang="en-GB" dirty="0"/>
+              <a:t> de </a:t>
+            </a:r>
+            <a:r>
+              <a:rPr lang="en-GB" dirty="0" err="1"/>
+              <a:t>pesca</a:t>
+            </a:r>
+            <a:endParaRPr lang="en-IT" dirty="0"/>
+          </a:p>
+        </p:txBody>
+      </p:sp>
+      <p:sp>
+        <p:nvSpPr>
+          <p:cNvPr id="11" name="TextBox 10">
+            <a:extLst>
+              <a:ext uri="{FF2B5EF4-FFF2-40B4-BE49-F238E27FC236}">
+                <a16:creationId xmlns:a16="http://schemas.microsoft.com/office/drawing/2014/main" id="{EEE0DB2E-6897-0E46-9C51-57A7AE1D310F}"/>
+              </a:ext>
+            </a:extLst>
+          </p:cNvPr>
+          <p:cNvSpPr txBox="1"/>
+          <p:nvPr/>
+        </p:nvSpPr>
+        <p:spPr>
+          <a:xfrm>
+            <a:off x="6836735" y="5625259"/>
+            <a:ext cx="4380614" cy="923330"/>
+          </a:xfrm>
+          <a:prstGeom prst="rect">
+            <a:avLst/>
+          </a:prstGeom>
+          <a:solidFill>
+            <a:schemeClr val="bg1"/>
+          </a:solidFill>
+          <a:ln w="25400">
+            <a:solidFill>
+              <a:schemeClr val="tx2">
+                <a:lumMod val="75000"/>
+                <a:lumOff val="25000"/>
+              </a:schemeClr>
+            </a:solidFill>
+          </a:ln>
+        </p:spPr>
+        <p:txBody>
+          <a:bodyPr wrap="square" rtlCol="0">
+            <a:spAutoFit/>
+          </a:bodyPr>
+          <a:lstStyle/>
+          <a:p>
+            <a:r>
+              <a:rPr lang="en-GB" dirty="0"/>
+              <a:t>A</a:t>
+            </a:r>
+            <a:r>
+              <a:rPr lang="en-IT" dirty="0"/>
+              <a:t>ctivity_2=</a:t>
+            </a:r>
+            <a:r>
+              <a:rPr lang="en-GB" dirty="0" err="1"/>
+              <a:t>Construção</a:t>
+            </a:r>
+            <a:r>
+              <a:rPr lang="en-GB" dirty="0"/>
+              <a:t> de mercados </a:t>
+            </a:r>
+            <a:r>
+              <a:rPr lang="en-GB" dirty="0" err="1"/>
+              <a:t>varejistas</a:t>
+            </a:r>
+            <a:r>
+              <a:rPr lang="en-GB" dirty="0"/>
+              <a:t> com </a:t>
+            </a:r>
+            <a:r>
+              <a:rPr lang="en-GB" dirty="0" err="1"/>
+              <a:t>armazenamento</a:t>
+            </a:r>
+            <a:r>
+              <a:rPr lang="en-GB" dirty="0"/>
+              <a:t> </a:t>
+            </a:r>
+            <a:r>
+              <a:rPr lang="en-GB" dirty="0" err="1"/>
+              <a:t>refrigerado</a:t>
+            </a:r>
+            <a:r>
+              <a:rPr lang="en-GB" dirty="0"/>
+              <a:t> e </a:t>
+            </a:r>
+            <a:r>
+              <a:rPr lang="en-GB" dirty="0" err="1"/>
+              <a:t>higiene</a:t>
+            </a:r>
+            <a:r>
+              <a:rPr lang="en-GB" dirty="0"/>
+              <a:t> de </a:t>
+            </a:r>
+            <a:r>
+              <a:rPr lang="en-GB" dirty="0" err="1"/>
+              <a:t>preparação</a:t>
+            </a:r>
+            <a:endParaRPr lang="en-IT" dirty="0"/>
+          </a:p>
+        </p:txBody>
+      </p:sp>
+      <p:sp>
+        <p:nvSpPr>
+          <p:cNvPr id="12" name="TextBox 11">
+            <a:extLst>
+              <a:ext uri="{FF2B5EF4-FFF2-40B4-BE49-F238E27FC236}">
+                <a16:creationId xmlns:a16="http://schemas.microsoft.com/office/drawing/2014/main" id="{8304D80A-A3EE-018E-CE70-8BF2931DA6E9}"/>
+              </a:ext>
+            </a:extLst>
+          </p:cNvPr>
+          <p:cNvSpPr txBox="1"/>
+          <p:nvPr/>
+        </p:nvSpPr>
+        <p:spPr>
+          <a:xfrm>
+            <a:off x="5791200" y="1034150"/>
+            <a:ext cx="808381" cy="584775"/>
+          </a:xfrm>
+          <a:prstGeom prst="rect">
+            <a:avLst/>
+          </a:prstGeom>
+          <a:noFill/>
+        </p:spPr>
+        <p:txBody>
+          <a:bodyPr wrap="square" rtlCol="0">
+            <a:spAutoFit/>
+          </a:bodyPr>
+          <a:lstStyle/>
+          <a:p>
+            <a:r>
+              <a:rPr lang="en-IT" sz="3200" dirty="0"/>
+              <a:t>*</a:t>
+            </a:r>
+          </a:p>
+        </p:txBody>
+      </p:sp>
+      <p:sp>
+        <p:nvSpPr>
+          <p:cNvPr id="13" name="TextBox 12">
+            <a:extLst>
+              <a:ext uri="{FF2B5EF4-FFF2-40B4-BE49-F238E27FC236}">
+                <a16:creationId xmlns:a16="http://schemas.microsoft.com/office/drawing/2014/main" id="{2E9C13ED-C276-2315-A87F-187BCFA6D2B7}"/>
+              </a:ext>
+            </a:extLst>
+          </p:cNvPr>
+          <p:cNvSpPr txBox="1"/>
+          <p:nvPr/>
+        </p:nvSpPr>
+        <p:spPr>
+          <a:xfrm>
+            <a:off x="4982819" y="4979214"/>
+            <a:ext cx="808381" cy="584775"/>
+          </a:xfrm>
+          <a:prstGeom prst="rect">
+            <a:avLst/>
+          </a:prstGeom>
+          <a:noFill/>
+        </p:spPr>
+        <p:txBody>
+          <a:bodyPr wrap="square" rtlCol="0">
+            <a:spAutoFit/>
+          </a:bodyPr>
+          <a:lstStyle/>
+          <a:p>
+            <a:r>
+              <a:rPr lang="en-IT" sz="3200" dirty="0"/>
+              <a:t>*</a:t>
+            </a:r>
+          </a:p>
+        </p:txBody>
+      </p:sp>
+      <p:sp>
+        <p:nvSpPr>
+          <p:cNvPr id="14" name="TextBox 13">
+            <a:extLst>
+              <a:ext uri="{FF2B5EF4-FFF2-40B4-BE49-F238E27FC236}">
+                <a16:creationId xmlns:a16="http://schemas.microsoft.com/office/drawing/2014/main" id="{32DF04FA-A9DF-FD3B-BD11-387270063E10}"/>
+              </a:ext>
+            </a:extLst>
+          </p:cNvPr>
+          <p:cNvSpPr txBox="1"/>
+          <p:nvPr/>
+        </p:nvSpPr>
+        <p:spPr>
+          <a:xfrm>
+            <a:off x="5657986" y="1987659"/>
+            <a:ext cx="808381" cy="584775"/>
+          </a:xfrm>
+          <a:prstGeom prst="rect">
+            <a:avLst/>
+          </a:prstGeom>
+          <a:noFill/>
+        </p:spPr>
+        <p:txBody>
+          <a:bodyPr wrap="square" rtlCol="0">
+            <a:spAutoFit/>
+          </a:bodyPr>
+          <a:lstStyle/>
+          <a:p>
+            <a:r>
+              <a:rPr lang="en-IT" sz="3200" dirty="0"/>
+              <a:t>*</a:t>
+            </a:r>
+          </a:p>
+        </p:txBody>
+      </p:sp>
+      <p:sp>
+        <p:nvSpPr>
+          <p:cNvPr id="15" name="TextBox 14">
+            <a:extLst>
+              <a:ext uri="{FF2B5EF4-FFF2-40B4-BE49-F238E27FC236}">
+                <a16:creationId xmlns:a16="http://schemas.microsoft.com/office/drawing/2014/main" id="{6CD81F71-33AB-2884-8A28-49FD4A505AA6}"/>
+              </a:ext>
+            </a:extLst>
+          </p:cNvPr>
+          <p:cNvSpPr txBox="1"/>
+          <p:nvPr/>
+        </p:nvSpPr>
+        <p:spPr>
+          <a:xfrm>
+            <a:off x="5657985" y="2421503"/>
+            <a:ext cx="808381" cy="584775"/>
+          </a:xfrm>
+          <a:prstGeom prst="rect">
+            <a:avLst/>
+          </a:prstGeom>
+          <a:noFill/>
+        </p:spPr>
+        <p:txBody>
+          <a:bodyPr wrap="square" rtlCol="0">
+            <a:spAutoFit/>
+          </a:bodyPr>
+          <a:lstStyle/>
+          <a:p>
+            <a:r>
+              <a:rPr lang="en-IT" sz="3200" dirty="0"/>
+              <a:t>*</a:t>
+            </a:r>
+          </a:p>
+        </p:txBody>
+      </p:sp>
+      <p:pic>
+        <p:nvPicPr>
+          <p:cNvPr id="3" name="Picture 2" descr="A graph with different colored bars&#10;&#10;AI-generated content may be incorrect.">
+            <a:extLst>
+              <a:ext uri="{FF2B5EF4-FFF2-40B4-BE49-F238E27FC236}">
+                <a16:creationId xmlns:a16="http://schemas.microsoft.com/office/drawing/2014/main" id="{49DE576E-4CDE-4378-F7AB-11EB32713B83}"/>
+              </a:ext>
+            </a:extLst>
+          </p:cNvPr>
+          <p:cNvPicPr>
+            <a:picLocks noChangeAspect="1"/>
+          </p:cNvPicPr>
+          <p:nvPr/>
+        </p:nvPicPr>
+        <p:blipFill>
+          <a:blip r:embed="rId2"/>
+          <a:stretch>
+            <a:fillRect/>
+          </a:stretch>
+        </p:blipFill>
+        <p:spPr>
+          <a:xfrm>
+            <a:off x="86882" y="0"/>
+            <a:ext cx="5704318" cy="6858000"/>
+          </a:xfrm>
+          <a:prstGeom prst="rect">
+            <a:avLst/>
+          </a:prstGeom>
+        </p:spPr>
+      </p:pic>
+    </p:spTree>
+    <p:extLst>
+      <p:ext uri="{BB962C8B-B14F-4D97-AF65-F5344CB8AC3E}">
+        <p14:creationId xmlns:p14="http://schemas.microsoft.com/office/powerpoint/2010/main" val="3408095910"/>
       </p:ext>
     </p:extLst>
   </p:cSld>
